--- a/data/employees/EMP055/AST-EMP055-01.pptx
+++ b/data/employees/EMP055/AST-EMP055-01.pptx
@@ -9,6 +9,7 @@
     <p:sldId id="257" r:id="rId8"/>
     <p:sldId id="258" r:id="rId9"/>
     <p:sldId id="259" r:id="rId10"/>
+    <p:sldId id="260" r:id="rId11"/>
   </p:sldIdLst>
   <p:sldSz cx="9144000" cy="6858000" type="screen4x3"/>
   <p:notesSz cx="6858000" cy="9144000"/>
@@ -3098,42 +3099,55 @@
             <a:spLocks noGrp="1"/>
           </p:cNvSpPr>
           <p:nvPr>
-            <p:ph type="ctrTitle"/>
-          </p:nvPr>
-        </p:nvSpPr>
-        <p:spPr/>
-        <p:txBody>
-          <a:bodyPr/>
-          <a:lstStyle/>
-          <a:p>
-            <a:r>
-              <a:t>Project update deck - EMP055</a:t>
-            </a:r>
-          </a:p>
-        </p:txBody>
-      </p:sp>
-      <p:sp>
-        <p:nvSpPr>
-          <p:cNvPr id="3" name="Subtitle 2"/>
-          <p:cNvSpPr>
-            <a:spLocks noGrp="1"/>
-          </p:cNvSpPr>
-          <p:nvPr>
-            <p:ph type="subTitle" idx="1"/>
-          </p:nvPr>
-        </p:nvSpPr>
-        <p:spPr/>
-        <p:txBody>
-          <a:bodyPr/>
-          <a:lstStyle/>
-          <a:p>
-            <a:r>
-              <a:t>Casey Lee | Director | R&amp;D</a:t>
-            </a:r>
-          </a:p>
-          <a:p>
-            <a:r>
-              <a:t>Prepared: 2025-02-26</a:t>
+            <p:ph type="title"/>
+          </p:nvPr>
+        </p:nvSpPr>
+        <p:spPr/>
+        <p:txBody>
+          <a:bodyPr/>
+          <a:lstStyle/>
+          <a:p>
+            <a:r>
+              <a:t>Ast Emp055 01 - EMP055</a:t>
+            </a:r>
+          </a:p>
+        </p:txBody>
+      </p:sp>
+      <p:sp>
+        <p:nvSpPr>
+          <p:cNvPr id="3" name="Content Placeholder 2"/>
+          <p:cNvSpPr>
+            <a:spLocks noGrp="1"/>
+          </p:cNvSpPr>
+          <p:nvPr>
+            <p:ph idx="1"/>
+          </p:nvPr>
+        </p:nvSpPr>
+        <p:spPr/>
+        <p:txBody>
+          <a:bodyPr/>
+          <a:lstStyle/>
+          <a:p>
+            <a:r>
+              <a:t>Slide 1: Executive Summary</a:t>
+            </a:r>
+          </a:p>
+          <a:p>
+            <a:pPr lvl="1"/>
+            <a:r>
+              <a:t>Section 1: Fabric semantic model planning. EMP055 contributes to ast emp055 01 through recurring collaboration, clear ownership boundaries, and measurable outcomes. The team captures decisions, open issues, and handoffs so that knowledge remains discoverable for future programs.</a:t>
+            </a:r>
+          </a:p>
+          <a:p>
+            <a:pPr lvl="1"/>
+            <a:r>
+              <a:t>Section 2: Automation backlog refinement. EMP055 contributes to ast emp055 01 through recurring collaboration, clear ownership boundaries, and measurable outcomes. The team captures decisions, open issues, and handoffs so that knowledge remains discoverable for future programs.</a:t>
+            </a:r>
+          </a:p>
+          <a:p>
+            <a:pPr lvl="1"/>
+            <a:r>
+              <a:t>Section 3: Department KPI performance. EMP055 contributes to ast emp055 01 through recurring collaboration, clear ownership boundaries, and measurable outcomes. The team captures decisions, open issues, and handoffs so that knowledge remains discoverable for future programs.</a:t>
             </a:r>
           </a:p>
         </p:txBody>
@@ -3172,7 +3186,7 @@
           <a:lstStyle/>
           <a:p>
             <a:r>
-              <a:t>Research Portfolio Status</a:t>
+              <a:t>Ast Emp055 01 - EMP055</a:t>
             </a:r>
           </a:p>
         </p:txBody>
@@ -3193,17 +3207,25 @@
           <a:lstStyle/>
           <a:p>
             <a:r>
-              <a:t>Overview of Research Portfolio Status for R&amp;D department.</a:t>
-            </a:r>
-          </a:p>
-          <a:p>
-            <a:r>
-              <a:t>Responsible: Casey Lee (Director)</a:t>
-            </a:r>
-          </a:p>
-          <a:p>
-            <a:r>
-              <a:t>Location: Bengaluru | Skills: MLOps, TypeScript, Fabric, Azure AI</a:t>
+              <a:t>Slide 2: Executive Summary</a:t>
+            </a:r>
+          </a:p>
+          <a:p>
+            <a:pPr lvl="1"/>
+            <a:r>
+              <a:t>Section 1: Fabric semantic model planning. EMP055 contributes to ast emp055 01 through recurring collaboration, clear ownership boundaries, and measurable outcomes. The team captures decisions, open issues, and handoffs so that knowledge remains discoverable for future programs.</a:t>
+            </a:r>
+          </a:p>
+          <a:p>
+            <a:pPr lvl="1"/>
+            <a:r>
+              <a:t>Section 2: Operational risk review. EMP055 contributes to ast emp055 01 through recurring collaboration, clear ownership boundaries, and measurable outcomes. The team captures decisions, open issues, and handoffs so that knowledge remains discoverable for future programs.</a:t>
+            </a:r>
+          </a:p>
+          <a:p>
+            <a:pPr lvl="1"/>
+            <a:r>
+              <a:t>Section 3: Automation backlog refinement. EMP055 contributes to ast emp055 01 through recurring collaboration, clear ownership boundaries, and measurable outcomes. The team captures decisions, open issues, and handoffs so that knowledge remains discoverable for future programs.</a:t>
             </a:r>
           </a:p>
         </p:txBody>
@@ -3242,7 +3264,7 @@
           <a:lstStyle/>
           <a:p>
             <a:r>
-              <a:t>IP Filing Pipeline</a:t>
+              <a:t>Ast Emp055 01 - EMP055</a:t>
             </a:r>
           </a:p>
         </p:txBody>
@@ -3263,17 +3285,25 @@
           <a:lstStyle/>
           <a:p>
             <a:r>
-              <a:t>Overview of IP Filing Pipeline for R&amp;D department.</a:t>
-            </a:r>
-          </a:p>
-          <a:p>
-            <a:r>
-              <a:t>Responsible: Casey Lee (Director)</a:t>
-            </a:r>
-          </a:p>
-          <a:p>
-            <a:r>
-              <a:t>Location: Bengaluru | Skills: MLOps, TypeScript, Fabric, Azure AI</a:t>
+              <a:t>Slide 3: Executive Summary</a:t>
+            </a:r>
+          </a:p>
+          <a:p>
+            <a:pPr lvl="1"/>
+            <a:r>
+              <a:t>Section 1: Department KPI performance. EMP055 contributes to ast emp055 01 through recurring collaboration, clear ownership boundaries, and measurable outcomes. The team captures decisions, open issues, and handoffs so that knowledge remains discoverable for future programs.</a:t>
+            </a:r>
+          </a:p>
+          <a:p>
+            <a:pPr lvl="1"/>
+            <a:r>
+              <a:t>Section 2: Knowledge transfer and onboarding. EMP055 contributes to ast emp055 01 through recurring collaboration, clear ownership boundaries, and measurable outcomes. The team captures decisions, open issues, and handoffs so that knowledge remains discoverable for future programs.</a:t>
+            </a:r>
+          </a:p>
+          <a:p>
+            <a:pPr lvl="1"/>
+            <a:r>
+              <a:t>Section 3: Quarterly delivery milestones. EMP055 contributes to ast emp055 01 through recurring collaboration, clear ownership boundaries, and measurable outcomes. The team captures decisions, open issues, and handoffs so that knowledge remains discoverable for future programs.</a:t>
             </a:r>
           </a:p>
         </p:txBody>
@@ -3312,7 +3342,7 @@
           <a:lstStyle/>
           <a:p>
             <a:r>
-              <a:t>Technology Readiness Levels</a:t>
+              <a:t>Ast Emp055 01 - EMP055</a:t>
             </a:r>
           </a:p>
         </p:txBody>
@@ -3333,17 +3363,103 @@
           <a:lstStyle/>
           <a:p>
             <a:r>
-              <a:t>Overview of Technology Readiness Levels for R&amp;D department.</a:t>
-            </a:r>
-          </a:p>
-          <a:p>
-            <a:r>
-              <a:t>Responsible: Casey Lee (Director)</a:t>
-            </a:r>
-          </a:p>
-          <a:p>
-            <a:r>
-              <a:t>Location: Bengaluru | Skills: MLOps, TypeScript, Fabric, Azure AI</a:t>
+              <a:t>Slide 4: Executive Summary</a:t>
+            </a:r>
+          </a:p>
+          <a:p>
+            <a:pPr lvl="1"/>
+            <a:r>
+              <a:t>Section 1: Customer escalation analysis. EMP055 contributes to ast emp055 01 through recurring collaboration, clear ownership boundaries, and measurable outcomes. The team captures decisions, open issues, and handoffs so that knowledge remains discoverable for future programs.</a:t>
+            </a:r>
+          </a:p>
+          <a:p>
+            <a:pPr lvl="1"/>
+            <a:r>
+              <a:t>Section 2: Customer escalation analysis. EMP055 contributes to ast emp055 01 through recurring collaboration, clear ownership boundaries, and measurable outcomes. The team captures decisions, open issues, and handoffs so that knowledge remains discoverable for future programs.</a:t>
+            </a:r>
+          </a:p>
+          <a:p>
+            <a:pPr lvl="1"/>
+            <a:r>
+              <a:t>Section 3: Fabric semantic model planning. EMP055 contributes to ast emp055 01 through recurring collaboration, clear ownership boundaries, and measurable outcomes. The team captures decisions, open issues, and handoffs so that knowledge remains discoverable for future programs.</a:t>
+            </a:r>
+          </a:p>
+        </p:txBody>
+      </p:sp>
+    </p:spTree>
+  </p:cSld>
+  <p:clrMapOvr>
+    <a:masterClrMapping/>
+  </p:clrMapOvr>
+</p:sld>
+</file>
+
+<file path=ppt/slides/slide5.xml><?xml version="1.0" encoding="utf-8"?>
+<p:sld xmlns:a="http://schemas.openxmlformats.org/drawingml/2006/main" xmlns:p="http://schemas.openxmlformats.org/presentationml/2006/main" xmlns:r="http://schemas.openxmlformats.org/officeDocument/2006/relationships">
+  <p:cSld>
+    <p:spTree>
+      <p:nvGrpSpPr>
+        <p:cNvPr id="1" name=""/>
+        <p:cNvGrpSpPr/>
+        <p:nvPr/>
+      </p:nvGrpSpPr>
+      <p:grpSpPr/>
+      <p:sp>
+        <p:nvSpPr>
+          <p:cNvPr id="2" name="Title 1"/>
+          <p:cNvSpPr>
+            <a:spLocks noGrp="1"/>
+          </p:cNvSpPr>
+          <p:nvPr>
+            <p:ph type="title"/>
+          </p:nvPr>
+        </p:nvSpPr>
+        <p:spPr/>
+        <p:txBody>
+          <a:bodyPr/>
+          <a:lstStyle/>
+          <a:p>
+            <a:r>
+              <a:t>Ast Emp055 01 - EMP055</a:t>
+            </a:r>
+          </a:p>
+        </p:txBody>
+      </p:sp>
+      <p:sp>
+        <p:nvSpPr>
+          <p:cNvPr id="3" name="Content Placeholder 2"/>
+          <p:cNvSpPr>
+            <a:spLocks noGrp="1"/>
+          </p:cNvSpPr>
+          <p:nvPr>
+            <p:ph idx="1"/>
+          </p:nvPr>
+        </p:nvSpPr>
+        <p:spPr/>
+        <p:txBody>
+          <a:bodyPr/>
+          <a:lstStyle/>
+          <a:p>
+            <a:r>
+              <a:t>Slide 5: Executive Summary</a:t>
+            </a:r>
+          </a:p>
+          <a:p>
+            <a:pPr lvl="1"/>
+            <a:r>
+              <a:t>Section 1: Data quality remediation. EMP055 contributes to ast emp055 01 through recurring collaboration, clear ownership boundaries, and measurable outcomes. The team captures decisions, open issues, and handoffs so that knowledge remains discoverable for future programs.</a:t>
+            </a:r>
+          </a:p>
+          <a:p>
+            <a:pPr lvl="1"/>
+            <a:r>
+              <a:t>Section 2: Department KPI performance. EMP055 contributes to ast emp055 01 through recurring collaboration, clear ownership boundaries, and measurable outcomes. The team captures decisions, open issues, and handoffs so that knowledge remains discoverable for future programs.</a:t>
+            </a:r>
+          </a:p>
+          <a:p>
+            <a:pPr lvl="1"/>
+            <a:r>
+              <a:t>Section 3: Automation backlog refinement. EMP055 contributes to ast emp055 01 through recurring collaboration, clear ownership boundaries, and measurable outcomes. The team captures decisions, open issues, and handoffs so that knowledge remains discoverable for future programs.</a:t>
             </a:r>
           </a:p>
         </p:txBody>
